--- a/en/slides/13-Computer_Architecture-Sequential_Machines-Code.pptx
+++ b/en/slides/13-Computer_Architecture-Sequential_Machines-Code.pptx
@@ -121,28 +121,36 @@
   <p:extLst>
     <p:ext uri="{521415D9-36F7-43E2-AB2F-B90AF26B5E84}">
       <p14:sectionLst xmlns:p14="http://schemas.microsoft.com/office/powerpoint/2010/main">
-        <p14:section name="Opening" id="{67c5a497-652b-75b8-6fed-fe8ca4c2c571}">
+        <p14:section name="Opening" id="{0bb9fe87-a66c-dceb-9e46-61ace97cc6a7}">
           <p14:sldIdLst>
             <p14:sldId id="256"/>
             <p14:sldId id="257"/>
           </p14:sldIdLst>
         </p14:section>
-        <p14:section name="The listings" id="{d2c63a56-6891-8998-c6c8-2591ef14968c}">
+        <p14:section name="Warm-up on the machine" id="{e116c06d-7323-9201-2e72-542bee75f315}">
           <p14:sldIdLst>
             <p14:sldId id="258"/>
+          </p14:sldIdLst>
+        </p14:section>
+        <p14:section name="Finite-state machines" id="{04b1caf3-2106-828e-49e0-08534a64e4c0}">
+          <p14:sldIdLst>
             <p14:sldId id="259"/>
+          </p14:sldIdLst>
+        </p14:section>
+        <p14:section name="Back to the machine" id="{940f9652-7c20-0576-2459-1f3edbfbcff2}">
+          <p14:sldIdLst>
             <p14:sldId id="260"/>
             <p14:sldId id="261"/>
           </p14:sldIdLst>
         </p14:section>
-        <p14:section name="The complete program" id="{51a2e981-356f-5518-76e9-f4c38e609044}">
+        <p14:section name="The complete program" id="{9f84be22-0340-9150-475c-cbc471416b58}">
           <p14:sldIdLst>
             <p14:sldId id="262"/>
             <p14:sldId id="263"/>
             <p14:sldId id="264"/>
           </p14:sldIdLst>
         </p14:section>
-        <p14:section name="Run it and test it" id="{a581ae2b-8bfc-cb55-e766-03339cc2c6fe}">
+        <p14:section name="Run it and test it" id="{ccd740b9-66ec-833f-0e06-f2dbdb926e6a}">
           <p14:sldIdLst>
             <p14:sldId id="265"/>
             <p14:sldId id="266"/>
@@ -151,7 +159,7 @@
             <p14:sldId id="269"/>
           </p14:sldIdLst>
         </p14:section>
-        <p14:section name="Exercises" id="{6b192f3d-abce-4bd3-b24f-4b85da74e2b6}">
+        <p14:section name="Exercises" id="{d4fbcf92-6979-c291-e608-8662efefaf00}">
           <p14:sldIdLst>
             <p14:sldId id="270"/>
           </p14:sldIdLst>
@@ -2780,7 +2788,63 @@
       </p:sp>
       <p:sp>
         <p:nvSpPr>
-          <p:cNvPr id="11" name="Shape 9"/>
+          <p:cNvPr id="11" name="Text 9"/>
+          <p:cNvSpPr txBox="1"/>
+          <p:nvPr/>
+        </p:nvSpPr>
+        <p:spPr>
+          <a:xfrm>
+            <a:off x="4693615" y="566928"/>
+            <a:ext cx="6949440" cy="640080"/>
+          </a:xfrm>
+          <a:prstGeom prst="rect">
+            <a:avLst/>
+          </a:prstGeom>
+          <a:noFill/>
+          <a:ln/>
+        </p:spPr>
+        <p:txBody>
+          <a:bodyPr wrap="square" lIns="0" tIns="0" rIns="0" bIns="0" rtlCol="0" anchor="t"/>
+          <a:lstStyle/>
+          <a:p>
+            <a:pPr algn="r" indent="0" marL="0">
+              <a:buNone/>
+            </a:pPr>
+            <a:r>
+              <a:rPr lang="en-US" sz="1300" dirty="0">
+                <a:solidFill>
+                  <a:srgbClr val="CFE3EA"/>
+                </a:solidFill>
+                <a:latin typeface="Calibri" pitchFamily="34" charset="0"/>
+                <a:ea typeface="Calibri" pitchFamily="34" charset="-122"/>
+                <a:cs typeface="Calibri" pitchFamily="34" charset="-120"/>
+              </a:rPr>
+              <a:t>Code deck. The concepts, the figures and the questions are in the lecture deck:</a:t>
+            </a:r>
+            <a:endParaRPr lang="en-US" sz="1300" dirty="0"/>
+          </a:p>
+          <a:p>
+            <a:pPr algn="r" indent="0" marL="0">
+              <a:buNone/>
+            </a:pPr>
+            <a:r>
+              <a:rPr lang="en-US" sz="1300" dirty="0">
+                <a:solidFill>
+                  <a:srgbClr val="CFE3EA"/>
+                </a:solidFill>
+                <a:latin typeface="Calibri" pitchFamily="34" charset="0"/>
+                <a:ea typeface="Calibri" pitchFamily="34" charset="-122"/>
+                <a:cs typeface="Calibri" pitchFamily="34" charset="-120"/>
+              </a:rPr>
+              <a:t>13-Computer_Architecture-Sequential_Machines.pptx</a:t>
+            </a:r>
+            <a:endParaRPr lang="en-US" sz="1300" dirty="0"/>
+          </a:p>
+        </p:txBody>
+      </p:sp>
+      <p:sp>
+        <p:nvSpPr>
+          <p:cNvPr id="12" name="Shape 10"/>
           <p:cNvSpPr/>
           <p:nvPr/>
         </p:nvSpPr>
@@ -2807,7 +2871,7 @@
       </p:sp>
       <p:pic>
         <p:nvPicPr>
-          <p:cNvPr id="12" name="Image 0" descr="/Users/raffaelemontella/devel/riscv-prg32/computer-architecture-with-prg32/tools/assets/game_pacman.png">    </p:cNvPr>
+          <p:cNvPr id="13" name="Image 0" descr="/Users/raffaelemontella/devel/riscv-prg32/computer-architecture-with-prg32/tools/assets/game_pacman.png">    </p:cNvPr>
           <p:cNvPicPr>
             <a:picLocks noChangeAspect="1"/>
           </p:cNvPicPr>
@@ -7943,7 +8007,7 @@
                 <a:ea typeface="Calibri" pitchFamily="34" charset="-122"/>
                 <a:cs typeface="Calibri" pitchFamily="34" charset="-120"/>
               </a:rPr>
-              <a:t>The 1 listing of Lecture 13, one per slide: read the code, then the numbered remarks beside it</a:t>
+              <a:t>The listing of Lecture 13: read the code, then the numbered remarks beside it</a:t>
             </a:r>
             <a:endParaRPr lang="en-US" sz="2200" dirty="0"/>
           </a:p>

--- a/en/slides/13-Computer_Architecture-Sequential_Machines-Code.pptx
+++ b/en/slides/13-Computer_Architecture-Sequential_Machines-Code.pptx
@@ -121,36 +121,36 @@
   <p:extLst>
     <p:ext uri="{521415D9-36F7-43E2-AB2F-B90AF26B5E84}">
       <p14:sectionLst xmlns:p14="http://schemas.microsoft.com/office/powerpoint/2010/main">
-        <p14:section name="Opening" id="{0bb9fe87-a66c-dceb-9e46-61ace97cc6a7}">
+        <p14:section name="Opening" id="{44302ae7-c897-67d2-5fd1-50ae41ffb166}">
           <p14:sldIdLst>
             <p14:sldId id="256"/>
             <p14:sldId id="257"/>
           </p14:sldIdLst>
         </p14:section>
-        <p14:section name="Warm-up on the machine" id="{e116c06d-7323-9201-2e72-542bee75f315}">
+        <p14:section name="Warm-up on the machine" id="{364c0d2b-c942-8ba0-1146-aba2098c8b5f}">
           <p14:sldIdLst>
             <p14:sldId id="258"/>
           </p14:sldIdLst>
         </p14:section>
-        <p14:section name="Finite-state machines" id="{04b1caf3-2106-828e-49e0-08534a64e4c0}">
+        <p14:section name="Finite-state machines" id="{1874e0ce-d30d-3349-2ffb-212219f4cc69}">
           <p14:sldIdLst>
             <p14:sldId id="259"/>
           </p14:sldIdLst>
         </p14:section>
-        <p14:section name="Back to the machine" id="{940f9652-7c20-0576-2459-1f3edbfbcff2}">
+        <p14:section name="Back to the machine" id="{f40234ff-18e1-591f-0e35-f5eb07b9280b}">
           <p14:sldIdLst>
             <p14:sldId id="260"/>
             <p14:sldId id="261"/>
           </p14:sldIdLst>
         </p14:section>
-        <p14:section name="The complete program" id="{9f84be22-0340-9150-475c-cbc471416b58}">
+        <p14:section name="The complete program" id="{2e0a4165-3fb4-ae7f-cc0c-185e1891ba1b}">
           <p14:sldIdLst>
             <p14:sldId id="262"/>
             <p14:sldId id="263"/>
             <p14:sldId id="264"/>
           </p14:sldIdLst>
         </p14:section>
-        <p14:section name="Run it and test it" id="{ccd740b9-66ec-833f-0e06-f2dbdb926e6a}">
+        <p14:section name="Run it and test it" id="{baad449c-ccbc-0dbe-ca66-0d158b2d6961}">
           <p14:sldIdLst>
             <p14:sldId id="265"/>
             <p14:sldId id="266"/>
@@ -159,7 +159,7 @@
             <p14:sldId id="269"/>
           </p14:sldIdLst>
         </p14:section>
-        <p14:section name="Exercises" id="{d4fbcf92-6979-c291-e608-8662efefaf00}">
+        <p14:section name="Exercises" id="{821b6385-25ea-4ab7-d6e6-c88df2736193}">
           <p14:sldIdLst>
             <p14:sldId id="270"/>
           </p14:sldIdLst>
@@ -568,7 +568,9 @@
           <a:p>
             <a:r>
               <a:rPr lang="en-US" dirty="0"/>
-              <a:t>This is the code deck of Lecture 13. The lecture deck holds the concepts; this one holds everything you type and run: the listings with their explanation, the complete program, what it shows, and the way to test it on each of the three hosts.</a:t>
+              <a:t>This is the code deck of Lecture 13. The lecture deck holds the concepts; this one holds everything you type and run: the listings with their explanation, the complete program, what it shows, and the way to test it on each of the three hosts.
+Learning status: UNDERSTAND NOW, by the end of this lecture you explain it, trace it and apply it on your own; USE NOW, you follow and use the recipe today; how it works inside is explained later, or is not part of the course; UNDERSTAND LATER, recognise the name and what it is for; a later lecture explains it. A slide without a badge is context: a story, an example, a question, an exercise.
+Learning status of this lecture. UNDERSTAND NOW: finite-state machines; the clock; latches and flip-flops; registers as flip-flops. USE NOW: the complete program, the PRG32 tools (used, not studied, in this course). UNDERSTAND LATER: nothing. A slide without a badge is context: a story, an example, a question, an exercise.</a:t>
             </a:r>
             <a:endParaRPr lang="en-US" dirty="0"/>
           </a:p>
@@ -746,6 +748,7 @@
             <a:r>
               <a:rPr lang="en-US" dirty="0"/>
               <a:t>The quickest way: PRG32-QT on your own computer. Four steps, each with its command. PRG32-QT behaves like a board on port 8080, which is why the upload command says esp32c6. With debug mode enabled you can stop at any instruction and read registers and memory.
+USE NOW: the PRG32 tools (used, not studied, in this course).
 For the lecturer: Run by the tests: the cartridge of this slide is built with this command and executed on the headless runner of PRG32-QT. Without the toolchain: import the .prg32 file in PRG32-QT and choose Run Cartridge. Keys: arrows or WASD for the joystick, Z or J for A, X or K for B, Enter for Start, Escape to go back to Setup.</a:t>
             </a:r>
             <a:endParaRPr lang="en-US" dirty="0"/>
@@ -835,6 +838,7 @@
             <a:r>
               <a:rPr lang="en-US" dirty="0"/>
               <a:t>The same program on the emulator. QEMU runs the real firmware on an emulated chip, so the cartridge must be built for the architecture qemu. Stage the cartridge while QEMU is closed. The firmware opens on the Setup menu: choose Run Cartridge and the slot. Remember that the keyboard is read by the terminal, not by the window with the picture.
+USE NOW: the PRG32 tools (used, not studied, in this course).
 For the lecturer: Checked by the tests up to the staging: the cartridge is built for the architecture qemu and accepted into the flash image of the emulator. What the emulator then shows is not checked automatically: Espressif QEMU needs its window. Since October 2026 the firmware starts on Setup: choose Run Cartridge, then cart0.</a:t>
             </a:r>
             <a:endParaRPr lang="en-US" dirty="0"/>
@@ -924,6 +928,7 @@
             <a:r>
               <a:rPr lang="en-US" dirty="0"/>
               <a:t>The same program on the kit. The firmware is written once, through USB; after that cartridges travel over Wi-Fi. The upload command is the one used for PRG32-QT with the address of the board. This is the only host that the automatic tests do not run: try it, and report what you see.
+USE NOW: the PRG32 tools (used, not studied, in this course).
 For the lecturer: Not run by the tests: there is no board on the test machine. The cartridge for the architecture esp32c6 is built by the tests; the steps are those of the PRG32 documentation. If the serial port is not found pass it explicitly. To use the Wi-Fi of the classroom: python3 -m prg32 wifi set --ssid NAME --password PASSWORD --mode sta.</a:t>
             </a:r>
             <a:endParaRPr lang="en-US" dirty="0"/>
@@ -1013,6 +1018,7 @@
             <a:r>
               <a:rPr lang="en-US" dirty="0"/>
               <a:t>The five most common symptoms, what each means, and what to do. Read the message before changing anything: it nearly always names the cause.
+USE NOW: the PRG32 tools (used, not studied, in this course).
 For the lecturer: The first three rows cover most cases. When asking for help, paste the command and the whole message as text. docs/usage/troubleshooting.md of the PRG32 repository has the complete list.</a:t>
             </a:r>
             <a:endParaRPr lang="en-US" dirty="0"/>
@@ -1280,6 +1286,7 @@
             <a:r>
               <a:rPr lang="en-US" dirty="0"/>
               <a:t>A game with a title screen, a playfield and a game-over screen. The variable state holds one of three values. game_update reads the button A and the present state: in TITLE, pressing A leads to PLAY; in OVER, pressing A leads back to TITLE; otherwise nothing changes. So the effect of A depends on the state. This is a state machine: update computes the next state from the present state and the input, the state survives in memory from frame to frame, and draw shows a screen for each state.
+UNDERSTAND NOW: finite-state machines.
 For the lecturer: Written for this lecture; the textbook capstone game has the same structure. Bug to discuss: holding A on the OVER screen goes to TITLE and, one frame later, to PLAY. Fixing it requires remembering the previous value of the button: one more bit of state.</a:t>
             </a:r>
             <a:endParaRPr lang="en-US" dirty="0"/>
@@ -1369,6 +1376,7 @@
             <a:r>
               <a:rPr lang="en-US" dirty="0"/>
               <a:t>The game of the warm-up drawn as a diagram: three states, with A leading from TITLE to PLAY and from OVER to TITLE, and the end of the lives leading from PLAY to OVER. The loops on each state are the cases in which nothing changes. The table below lists, for each state, the input that changes it, the next state and the output drawn. Draw the diagram before writing the code: for a game it is the most useful design habit there is.
+UNDERSTAND NOW: finite-state machines.
 For the lecturer: A Moore machine with three states: two bits of state would be enough, the program uses a whole word. Drawing the diagram before writing the code is the single most useful design habit for a game.</a:t>
             </a:r>
             <a:endParaRPr lang="en-US" dirty="0"/>
@@ -1458,6 +1466,7 @@
             <a:r>
               <a:rPr lang="en-US" dirty="0"/>
               <a:t>The program counter, PC, is the register that holds the address of the instruction being executed. Its next value is computed by a small network: an adder gives PC plus 4, the address of the following instruction, and a multiplexer chooses between that and the target of a branch. At each clock edge the next value becomes the present one. It has exactly the shape of the general architecture. With only the plus 4 path it is a counter, the simplest of all state machines.
+UNDERSTAND NOW: registers as flip-flops.
 For the lecturer: The comparator of Lecture 11 produces 'branch taken?' for beq and bne. Instructions are 4 bytes apart; with the compressed extension the adder adds 2 for 16-bit instructions.</a:t>
             </a:r>
             <a:endParaRPr lang="en-US" dirty="0"/>
@@ -1547,6 +1556,7 @@
             <a:r>
               <a:rPr lang="en-US" dirty="0"/>
               <a:t>The whole processor is a sequential machine. Its state is the program counter, the thirty-two registers and the memory. Its input is the instruction found at the address in the PC, with the data it reads. The next-state network is made of decoders, multiplexers and the ALU. At the clock edge the registers named by the instruction take their new values. Running a program is a walk through the states of a very large state machine, and single-stepping in PRG32-QT shows that walk one state at a time.
+UNDERSTAND NOW: finite-state machines.
 For the lecturer: This is the bridge to the lectures on the processor: datapath (the combinational part and the registers) and control (itself a finite-state machine in multi-cycle and microprogrammed designs).</a:t>
             </a:r>
             <a:endParaRPr lang="en-US" dirty="0"/>
@@ -1636,6 +1646,7 @@
             <a:r>
               <a:rPr lang="en-US" dirty="0"/>
               <a:t>One page of the complete program, exactly as it is in the repository. Read it from the top: the header says what the program shows and how to build it; the three functions init, update and draw follow, then the data. Lines that you met in the listings of the lecture have the same comments here.
+USE NOW: the complete program (used, not studied, in this course).
 For the lecturer: code/l13.S, as built and run by the tests. The comments are part of the program: read them with the code.</a:t>
             </a:r>
             <a:endParaRPr lang="en-US" dirty="0"/>
@@ -1725,6 +1736,7 @@
             <a:r>
               <a:rPr lang="en-US" dirty="0"/>
               <a:t>One page of the complete program, exactly as it is in the repository. Read it from the top: the header says what the program shows and how to build it; the three functions init, update and draw follow, then the data. Lines that you met in the listings of the lecture have the same comments here.
+USE NOW: the complete program (used, not studied, in this course).
 For the lecturer: code/l13.S, as built and run by the tests. The comments are part of the program: read them with the code.</a:t>
             </a:r>
             <a:endParaRPr lang="en-US" dirty="0"/>
@@ -1814,6 +1826,7 @@
             <a:r>
               <a:rPr lang="en-US" dirty="0"/>
               <a:t>One page of the complete program, exactly as it is in the repository. Read it from the top: the header says what the program shows and how to build it; the three functions init, update and draw follow, then the data. Lines that you met in the listings of the lecture have the same comments here.
+USE NOW: the complete program (used, not studied, in this course).
 For the lecturer: code/l13.S, as built and run by the tests. The comments are part of the program: read them with the code.</a:t>
             </a:r>
             <a:endParaRPr lang="en-US" dirty="0"/>
@@ -2895,6 +2908,420 @@
       </p:pic>
       <p:sp>
         <p:nvSpPr>
+          <p:cNvPr id="14" name="Shape 11"/>
+          <p:cNvSpPr/>
+          <p:nvPr/>
+        </p:nvSpPr>
+        <p:spPr>
+          <a:xfrm>
+            <a:off x="9690303" y="91440"/>
+            <a:ext cx="1952752" cy="274320"/>
+          </a:xfrm>
+          <a:prstGeom prst="rect">
+            <a:avLst/>
+          </a:prstGeom>
+          <a:solidFill>
+            <a:srgbClr val="F3E8FF"/>
+          </a:solidFill>
+          <a:ln w="12700">
+            <a:solidFill>
+              <a:srgbClr val="7E22CE"/>
+            </a:solidFill>
+            <a:prstDash val="dash"/>
+          </a:ln>
+        </p:spPr>
+      </p:sp>
+      <p:sp>
+        <p:nvSpPr>
+          <p:cNvPr id="15" name="Shape 12"/>
+          <p:cNvSpPr/>
+          <p:nvPr/>
+        </p:nvSpPr>
+        <p:spPr>
+          <a:xfrm>
+            <a:off x="9717735" y="128016"/>
+            <a:ext cx="45720" cy="45720"/>
+          </a:xfrm>
+          <a:prstGeom prst="rect">
+            <a:avLst/>
+          </a:prstGeom>
+          <a:solidFill>
+            <a:srgbClr val="7E22CE"/>
+          </a:solidFill>
+          <a:ln w="12700">
+            <a:solidFill>
+              <a:srgbClr val="7E22CE"/>
+            </a:solidFill>
+            <a:prstDash val="solid"/>
+          </a:ln>
+        </p:spPr>
+      </p:sp>
+      <p:sp>
+        <p:nvSpPr>
+          <p:cNvPr id="16" name="Shape 13"/>
+          <p:cNvSpPr/>
+          <p:nvPr/>
+        </p:nvSpPr>
+        <p:spPr>
+          <a:xfrm>
+            <a:off x="9717735" y="205740"/>
+            <a:ext cx="45720" cy="45720"/>
+          </a:xfrm>
+          <a:prstGeom prst="rect">
+            <a:avLst/>
+          </a:prstGeom>
+          <a:solidFill>
+            <a:srgbClr val="7E22CE"/>
+          </a:solidFill>
+          <a:ln w="12700">
+            <a:solidFill>
+              <a:srgbClr val="7E22CE"/>
+            </a:solidFill>
+            <a:prstDash val="solid"/>
+          </a:ln>
+        </p:spPr>
+      </p:sp>
+      <p:sp>
+        <p:nvSpPr>
+          <p:cNvPr id="17" name="Shape 14"/>
+          <p:cNvSpPr/>
+          <p:nvPr/>
+        </p:nvSpPr>
+        <p:spPr>
+          <a:xfrm>
+            <a:off x="9717735" y="283464"/>
+            <a:ext cx="45720" cy="45720"/>
+          </a:xfrm>
+          <a:prstGeom prst="rect">
+            <a:avLst/>
+          </a:prstGeom>
+          <a:solidFill>
+            <a:srgbClr val="7E22CE"/>
+          </a:solidFill>
+          <a:ln w="12700">
+            <a:solidFill>
+              <a:srgbClr val="7E22CE"/>
+            </a:solidFill>
+            <a:prstDash val="solid"/>
+          </a:ln>
+        </p:spPr>
+      </p:sp>
+      <p:pic>
+        <p:nvPicPr>
+          <p:cNvPr id="18" name="Image 1" descr="preencoded.png">    </p:cNvPr>
+          <p:cNvPicPr>
+            <a:picLocks noChangeAspect="1"/>
+          </p:cNvPicPr>
+          <p:nvPr/>
+        </p:nvPicPr>
+        <p:blipFill>
+          <a:blip r:embed="rId2"/>
+          <a:stretch>
+            <a:fillRect/>
+          </a:stretch>
+        </p:blipFill>
+        <p:spPr>
+          <a:xfrm>
+            <a:off x="9818319" y="128016"/>
+            <a:ext cx="201168" cy="201168"/>
+          </a:xfrm>
+          <a:prstGeom prst="rect">
+            <a:avLst/>
+          </a:prstGeom>
+        </p:spPr>
+      </p:pic>
+      <p:sp>
+        <p:nvSpPr>
+          <p:cNvPr id="19" name="Text 15"/>
+          <p:cNvSpPr txBox="1"/>
+          <p:nvPr/>
+        </p:nvSpPr>
+        <p:spPr>
+          <a:xfrm>
+            <a:off x="10074351" y="91440"/>
+            <a:ext cx="1532128" cy="274320"/>
+          </a:xfrm>
+          <a:prstGeom prst="rect">
+            <a:avLst/>
+          </a:prstGeom>
+          <a:noFill/>
+          <a:ln/>
+        </p:spPr>
+        <p:txBody>
+          <a:bodyPr wrap="square" lIns="0" tIns="0" rIns="0" bIns="0" rtlCol="0" anchor="ctr"/>
+          <a:lstStyle/>
+          <a:p>
+            <a:pPr indent="0" marL="0">
+              <a:buNone/>
+            </a:pPr>
+            <a:r>
+              <a:rPr lang="en-US" sz="1100" b="1" dirty="0">
+                <a:solidFill>
+                  <a:srgbClr val="6B21A8"/>
+                </a:solidFill>
+                <a:latin typeface="Calibri" pitchFamily="34" charset="0"/>
+                <a:ea typeface="Calibri" pitchFamily="34" charset="-122"/>
+                <a:cs typeface="Calibri" pitchFamily="34" charset="-120"/>
+              </a:rPr>
+              <a:t>UNDERSTAND LATER</a:t>
+            </a:r>
+            <a:endParaRPr lang="en-US" sz="1100" dirty="0"/>
+          </a:p>
+        </p:txBody>
+      </p:sp>
+      <p:sp>
+        <p:nvSpPr>
+          <p:cNvPr id="20" name="Shape 16"/>
+          <p:cNvSpPr/>
+          <p:nvPr/>
+        </p:nvSpPr>
+        <p:spPr>
+          <a:xfrm>
+            <a:off x="8407349" y="91440"/>
+            <a:ext cx="1173226" cy="274320"/>
+          </a:xfrm>
+          <a:prstGeom prst="rect">
+            <a:avLst/>
+          </a:prstGeom>
+          <a:solidFill>
+            <a:srgbClr val="FEF3C7"/>
+          </a:solidFill>
+          <a:ln w="12700">
+            <a:solidFill>
+              <a:srgbClr val="B45309"/>
+            </a:solidFill>
+            <a:prstDash val="solid"/>
+          </a:ln>
+        </p:spPr>
+      </p:sp>
+      <p:sp>
+        <p:nvSpPr>
+          <p:cNvPr id="21" name="Shape 17"/>
+          <p:cNvSpPr/>
+          <p:nvPr/>
+        </p:nvSpPr>
+        <p:spPr>
+          <a:xfrm>
+            <a:off x="8407349" y="91440"/>
+            <a:ext cx="27432" cy="274320"/>
+          </a:xfrm>
+          <a:prstGeom prst="rect">
+            <a:avLst/>
+          </a:prstGeom>
+          <a:solidFill>
+            <a:srgbClr val="B45309"/>
+          </a:solidFill>
+          <a:ln w="12700">
+            <a:solidFill>
+              <a:srgbClr val="B45309"/>
+            </a:solidFill>
+            <a:prstDash val="solid"/>
+          </a:ln>
+        </p:spPr>
+      </p:sp>
+      <p:sp>
+        <p:nvSpPr>
+          <p:cNvPr id="22" name="Shape 18"/>
+          <p:cNvSpPr/>
+          <p:nvPr/>
+        </p:nvSpPr>
+        <p:spPr>
+          <a:xfrm>
+            <a:off x="8462213" y="91440"/>
+            <a:ext cx="27432" cy="274320"/>
+          </a:xfrm>
+          <a:prstGeom prst="rect">
+            <a:avLst/>
+          </a:prstGeom>
+          <a:solidFill>
+            <a:srgbClr val="B45309"/>
+          </a:solidFill>
+          <a:ln w="12700">
+            <a:solidFill>
+              <a:srgbClr val="B45309"/>
+            </a:solidFill>
+            <a:prstDash val="solid"/>
+          </a:ln>
+        </p:spPr>
+      </p:sp>
+      <p:pic>
+        <p:nvPicPr>
+          <p:cNvPr id="23" name="Image 2" descr="preencoded.png">    </p:cNvPr>
+          <p:cNvPicPr>
+            <a:picLocks noChangeAspect="1"/>
+          </p:cNvPicPr>
+          <p:nvPr/>
+        </p:nvPicPr>
+        <p:blipFill>
+          <a:blip r:embed="rId3"/>
+          <a:stretch>
+            <a:fillRect/>
+          </a:stretch>
+        </p:blipFill>
+        <p:spPr>
+          <a:xfrm>
+            <a:off x="8535365" y="128016"/>
+            <a:ext cx="201168" cy="201168"/>
+          </a:xfrm>
+          <a:prstGeom prst="rect">
+            <a:avLst/>
+          </a:prstGeom>
+        </p:spPr>
+      </p:pic>
+      <p:sp>
+        <p:nvSpPr>
+          <p:cNvPr id="24" name="Text 19"/>
+          <p:cNvSpPr txBox="1"/>
+          <p:nvPr/>
+        </p:nvSpPr>
+        <p:spPr>
+          <a:xfrm>
+            <a:off x="8791397" y="91440"/>
+            <a:ext cx="752602" cy="274320"/>
+          </a:xfrm>
+          <a:prstGeom prst="rect">
+            <a:avLst/>
+          </a:prstGeom>
+          <a:noFill/>
+          <a:ln/>
+        </p:spPr>
+        <p:txBody>
+          <a:bodyPr wrap="square" lIns="0" tIns="0" rIns="0" bIns="0" rtlCol="0" anchor="ctr"/>
+          <a:lstStyle/>
+          <a:p>
+            <a:pPr indent="0" marL="0">
+              <a:buNone/>
+            </a:pPr>
+            <a:r>
+              <a:rPr lang="en-US" sz="1100" b="1" dirty="0">
+                <a:solidFill>
+                  <a:srgbClr val="92400E"/>
+                </a:solidFill>
+                <a:latin typeface="Calibri" pitchFamily="34" charset="0"/>
+                <a:ea typeface="Calibri" pitchFamily="34" charset="-122"/>
+                <a:cs typeface="Calibri" pitchFamily="34" charset="-120"/>
+              </a:rPr>
+              <a:t>USE NOW</a:t>
+            </a:r>
+            <a:endParaRPr lang="en-US" sz="1100" dirty="0"/>
+          </a:p>
+        </p:txBody>
+      </p:sp>
+      <p:sp>
+        <p:nvSpPr>
+          <p:cNvPr id="25" name="Shape 20"/>
+          <p:cNvSpPr/>
+          <p:nvPr/>
+        </p:nvSpPr>
+        <p:spPr>
+          <a:xfrm>
+            <a:off x="6518097" y="91440"/>
+            <a:ext cx="1779524" cy="274320"/>
+          </a:xfrm>
+          <a:prstGeom prst="rect">
+            <a:avLst/>
+          </a:prstGeom>
+          <a:solidFill>
+            <a:srgbClr val="E0F2FE"/>
+          </a:solidFill>
+          <a:ln w="12700">
+            <a:solidFill>
+              <a:srgbClr val="0369A1"/>
+            </a:solidFill>
+            <a:prstDash val="solid"/>
+          </a:ln>
+        </p:spPr>
+      </p:sp>
+      <p:sp>
+        <p:nvSpPr>
+          <p:cNvPr id="26" name="Shape 21"/>
+          <p:cNvSpPr/>
+          <p:nvPr/>
+        </p:nvSpPr>
+        <p:spPr>
+          <a:xfrm>
+            <a:off x="6518097" y="91440"/>
+            <a:ext cx="73152" cy="274320"/>
+          </a:xfrm>
+          <a:prstGeom prst="rect">
+            <a:avLst/>
+          </a:prstGeom>
+          <a:solidFill>
+            <a:srgbClr val="0369A1"/>
+          </a:solidFill>
+          <a:ln w="12700">
+            <a:solidFill>
+              <a:srgbClr val="0369A1"/>
+            </a:solidFill>
+            <a:prstDash val="solid"/>
+          </a:ln>
+        </p:spPr>
+      </p:sp>
+      <p:pic>
+        <p:nvPicPr>
+          <p:cNvPr id="27" name="Image 3" descr="preencoded.png">    </p:cNvPr>
+          <p:cNvPicPr>
+            <a:picLocks noChangeAspect="1"/>
+          </p:cNvPicPr>
+          <p:nvPr/>
+        </p:nvPicPr>
+        <p:blipFill>
+          <a:blip r:embed="rId4"/>
+          <a:stretch>
+            <a:fillRect/>
+          </a:stretch>
+        </p:blipFill>
+        <p:spPr>
+          <a:xfrm>
+            <a:off x="6646113" y="128016"/>
+            <a:ext cx="201168" cy="201168"/>
+          </a:xfrm>
+          <a:prstGeom prst="rect">
+            <a:avLst/>
+          </a:prstGeom>
+        </p:spPr>
+      </p:pic>
+      <p:sp>
+        <p:nvSpPr>
+          <p:cNvPr id="28" name="Text 22"/>
+          <p:cNvSpPr txBox="1"/>
+          <p:nvPr/>
+        </p:nvSpPr>
+        <p:spPr>
+          <a:xfrm>
+            <a:off x="6902145" y="91440"/>
+            <a:ext cx="1358900" cy="274320"/>
+          </a:xfrm>
+          <a:prstGeom prst="rect">
+            <a:avLst/>
+          </a:prstGeom>
+          <a:noFill/>
+          <a:ln/>
+        </p:spPr>
+        <p:txBody>
+          <a:bodyPr wrap="square" lIns="0" tIns="0" rIns="0" bIns="0" rtlCol="0" anchor="ctr"/>
+          <a:lstStyle/>
+          <a:p>
+            <a:pPr indent="0" marL="0">
+              <a:buNone/>
+            </a:pPr>
+            <a:r>
+              <a:rPr lang="en-US" sz="1100" b="1" dirty="0">
+                <a:solidFill>
+                  <a:srgbClr val="075985"/>
+                </a:solidFill>
+                <a:latin typeface="Calibri" pitchFamily="34" charset="0"/>
+                <a:ea typeface="Calibri" pitchFamily="34" charset="-122"/>
+                <a:cs typeface="Calibri" pitchFamily="34" charset="-120"/>
+              </a:rPr>
+              <a:t>UNDERSTAND NOW</a:t>
+            </a:r>
+            <a:endParaRPr lang="en-US" sz="1100" dirty="0"/>
+          </a:p>
+        </p:txBody>
+      </p:sp>
+      <p:sp>
+        <p:nvSpPr>
           <p:cNvPr id="25" name="Slide Number Placeholder 0"/>
           <p:cNvSpPr>
             <a:spLocks noGrp="1"/>
@@ -4048,6 +4475,158 @@
       </p:sp>
       <p:sp>
         <p:nvSpPr>
+          <p:cNvPr id="17" name="Shape 15"/>
+          <p:cNvSpPr/>
+          <p:nvPr/>
+        </p:nvSpPr>
+        <p:spPr>
+          <a:xfrm>
+            <a:off x="9287967" y="91440"/>
+            <a:ext cx="2355088" cy="274320"/>
+          </a:xfrm>
+          <a:prstGeom prst="rect">
+            <a:avLst/>
+          </a:prstGeom>
+          <a:solidFill>
+            <a:srgbClr val="FEF3C7"/>
+          </a:solidFill>
+          <a:ln w="12700">
+            <a:solidFill>
+              <a:srgbClr val="B45309"/>
+            </a:solidFill>
+            <a:prstDash val="solid"/>
+          </a:ln>
+        </p:spPr>
+      </p:sp>
+      <p:sp>
+        <p:nvSpPr>
+          <p:cNvPr id="18" name="Shape 16"/>
+          <p:cNvSpPr/>
+          <p:nvPr/>
+        </p:nvSpPr>
+        <p:spPr>
+          <a:xfrm>
+            <a:off x="9287967" y="91440"/>
+            <a:ext cx="27432" cy="274320"/>
+          </a:xfrm>
+          <a:prstGeom prst="rect">
+            <a:avLst/>
+          </a:prstGeom>
+          <a:solidFill>
+            <a:srgbClr val="B45309"/>
+          </a:solidFill>
+          <a:ln w="12700">
+            <a:solidFill>
+              <a:srgbClr val="B45309"/>
+            </a:solidFill>
+            <a:prstDash val="solid"/>
+          </a:ln>
+        </p:spPr>
+      </p:sp>
+      <p:sp>
+        <p:nvSpPr>
+          <p:cNvPr id="19" name="Shape 17"/>
+          <p:cNvSpPr/>
+          <p:nvPr/>
+        </p:nvSpPr>
+        <p:spPr>
+          <a:xfrm>
+            <a:off x="9342831" y="91440"/>
+            <a:ext cx="27432" cy="274320"/>
+          </a:xfrm>
+          <a:prstGeom prst="rect">
+            <a:avLst/>
+          </a:prstGeom>
+          <a:solidFill>
+            <a:srgbClr val="B45309"/>
+          </a:solidFill>
+          <a:ln w="12700">
+            <a:solidFill>
+              <a:srgbClr val="B45309"/>
+            </a:solidFill>
+            <a:prstDash val="solid"/>
+          </a:ln>
+        </p:spPr>
+      </p:sp>
+      <p:pic>
+        <p:nvPicPr>
+          <p:cNvPr id="20" name="Image 0" descr="preencoded.png">    </p:cNvPr>
+          <p:cNvPicPr>
+            <a:picLocks noChangeAspect="1"/>
+          </p:cNvPicPr>
+          <p:nvPr/>
+        </p:nvPicPr>
+        <p:blipFill>
+          <a:blip r:embed="rId1"/>
+          <a:stretch>
+            <a:fillRect/>
+          </a:stretch>
+        </p:blipFill>
+        <p:spPr>
+          <a:xfrm>
+            <a:off x="9415983" y="128016"/>
+            <a:ext cx="201168" cy="201168"/>
+          </a:xfrm>
+          <a:prstGeom prst="rect">
+            <a:avLst/>
+          </a:prstGeom>
+        </p:spPr>
+      </p:pic>
+      <p:sp>
+        <p:nvSpPr>
+          <p:cNvPr id="21" name="Text 18"/>
+          <p:cNvSpPr txBox="1"/>
+          <p:nvPr/>
+        </p:nvSpPr>
+        <p:spPr>
+          <a:xfrm>
+            <a:off x="9672015" y="91440"/>
+            <a:ext cx="1934464" cy="274320"/>
+          </a:xfrm>
+          <a:prstGeom prst="rect">
+            <a:avLst/>
+          </a:prstGeom>
+          <a:noFill/>
+          <a:ln/>
+        </p:spPr>
+        <p:txBody>
+          <a:bodyPr wrap="square" lIns="0" tIns="0" rIns="0" bIns="0" rtlCol="0" anchor="ctr"/>
+          <a:lstStyle/>
+          <a:p>
+            <a:pPr indent="0" marL="0">
+              <a:buNone/>
+            </a:pPr>
+            <a:r>
+              <a:rPr lang="en-US" sz="1100" b="1" dirty="0">
+                <a:solidFill>
+                  <a:srgbClr val="92400E"/>
+                </a:solidFill>
+                <a:latin typeface="Calibri" pitchFamily="34" charset="0"/>
+                <a:ea typeface="Calibri" pitchFamily="34" charset="-122"/>
+                <a:cs typeface="Calibri" pitchFamily="34" charset="-120"/>
+              </a:rPr>
+              <a:t>USE NOW</a:t>
+            </a:r>
+            <a:pPr indent="0" marL="0">
+              <a:buNone/>
+            </a:pPr>
+            <a:r>
+              <a:rPr lang="en-US" sz="1100" dirty="0">
+                <a:solidFill>
+                  <a:srgbClr val="92400E"/>
+                </a:solidFill>
+                <a:latin typeface="Calibri" pitchFamily="34" charset="0"/>
+                <a:ea typeface="Calibri" pitchFamily="34" charset="-122"/>
+                <a:cs typeface="Calibri" pitchFamily="34" charset="-120"/>
+              </a:rPr>
+              <a:t> · the PRG32 tools</a:t>
+            </a:r>
+            <a:endParaRPr lang="en-US" sz="1100" dirty="0"/>
+          </a:p>
+        </p:txBody>
+      </p:sp>
+      <p:sp>
+        <p:nvSpPr>
           <p:cNvPr id="25" name="Slide Number Placeholder 0"/>
           <p:cNvSpPr>
             <a:spLocks noGrp="1"/>
@@ -4884,6 +5463,158 @@
       </p:sp>
       <p:sp>
         <p:nvSpPr>
+          <p:cNvPr id="17" name="Shape 15"/>
+          <p:cNvSpPr/>
+          <p:nvPr/>
+        </p:nvSpPr>
+        <p:spPr>
+          <a:xfrm>
+            <a:off x="9287967" y="91440"/>
+            <a:ext cx="2355088" cy="274320"/>
+          </a:xfrm>
+          <a:prstGeom prst="rect">
+            <a:avLst/>
+          </a:prstGeom>
+          <a:solidFill>
+            <a:srgbClr val="FEF3C7"/>
+          </a:solidFill>
+          <a:ln w="12700">
+            <a:solidFill>
+              <a:srgbClr val="B45309"/>
+            </a:solidFill>
+            <a:prstDash val="solid"/>
+          </a:ln>
+        </p:spPr>
+      </p:sp>
+      <p:sp>
+        <p:nvSpPr>
+          <p:cNvPr id="18" name="Shape 16"/>
+          <p:cNvSpPr/>
+          <p:nvPr/>
+        </p:nvSpPr>
+        <p:spPr>
+          <a:xfrm>
+            <a:off x="9287967" y="91440"/>
+            <a:ext cx="27432" cy="274320"/>
+          </a:xfrm>
+          <a:prstGeom prst="rect">
+            <a:avLst/>
+          </a:prstGeom>
+          <a:solidFill>
+            <a:srgbClr val="B45309"/>
+          </a:solidFill>
+          <a:ln w="12700">
+            <a:solidFill>
+              <a:srgbClr val="B45309"/>
+            </a:solidFill>
+            <a:prstDash val="solid"/>
+          </a:ln>
+        </p:spPr>
+      </p:sp>
+      <p:sp>
+        <p:nvSpPr>
+          <p:cNvPr id="19" name="Shape 17"/>
+          <p:cNvSpPr/>
+          <p:nvPr/>
+        </p:nvSpPr>
+        <p:spPr>
+          <a:xfrm>
+            <a:off x="9342831" y="91440"/>
+            <a:ext cx="27432" cy="274320"/>
+          </a:xfrm>
+          <a:prstGeom prst="rect">
+            <a:avLst/>
+          </a:prstGeom>
+          <a:solidFill>
+            <a:srgbClr val="B45309"/>
+          </a:solidFill>
+          <a:ln w="12700">
+            <a:solidFill>
+              <a:srgbClr val="B45309"/>
+            </a:solidFill>
+            <a:prstDash val="solid"/>
+          </a:ln>
+        </p:spPr>
+      </p:sp>
+      <p:pic>
+        <p:nvPicPr>
+          <p:cNvPr id="20" name="Image 0" descr="preencoded.png">    </p:cNvPr>
+          <p:cNvPicPr>
+            <a:picLocks noChangeAspect="1"/>
+          </p:cNvPicPr>
+          <p:nvPr/>
+        </p:nvPicPr>
+        <p:blipFill>
+          <a:blip r:embed="rId1"/>
+          <a:stretch>
+            <a:fillRect/>
+          </a:stretch>
+        </p:blipFill>
+        <p:spPr>
+          <a:xfrm>
+            <a:off x="9415983" y="128016"/>
+            <a:ext cx="201168" cy="201168"/>
+          </a:xfrm>
+          <a:prstGeom prst="rect">
+            <a:avLst/>
+          </a:prstGeom>
+        </p:spPr>
+      </p:pic>
+      <p:sp>
+        <p:nvSpPr>
+          <p:cNvPr id="21" name="Text 18"/>
+          <p:cNvSpPr txBox="1"/>
+          <p:nvPr/>
+        </p:nvSpPr>
+        <p:spPr>
+          <a:xfrm>
+            <a:off x="9672015" y="91440"/>
+            <a:ext cx="1934464" cy="274320"/>
+          </a:xfrm>
+          <a:prstGeom prst="rect">
+            <a:avLst/>
+          </a:prstGeom>
+          <a:noFill/>
+          <a:ln/>
+        </p:spPr>
+        <p:txBody>
+          <a:bodyPr wrap="square" lIns="0" tIns="0" rIns="0" bIns="0" rtlCol="0" anchor="ctr"/>
+          <a:lstStyle/>
+          <a:p>
+            <a:pPr indent="0" marL="0">
+              <a:buNone/>
+            </a:pPr>
+            <a:r>
+              <a:rPr lang="en-US" sz="1100" b="1" dirty="0">
+                <a:solidFill>
+                  <a:srgbClr val="92400E"/>
+                </a:solidFill>
+                <a:latin typeface="Calibri" pitchFamily="34" charset="0"/>
+                <a:ea typeface="Calibri" pitchFamily="34" charset="-122"/>
+                <a:cs typeface="Calibri" pitchFamily="34" charset="-120"/>
+              </a:rPr>
+              <a:t>USE NOW</a:t>
+            </a:r>
+            <a:pPr indent="0" marL="0">
+              <a:buNone/>
+            </a:pPr>
+            <a:r>
+              <a:rPr lang="en-US" sz="1100" dirty="0">
+                <a:solidFill>
+                  <a:srgbClr val="92400E"/>
+                </a:solidFill>
+                <a:latin typeface="Calibri" pitchFamily="34" charset="0"/>
+                <a:ea typeface="Calibri" pitchFamily="34" charset="-122"/>
+                <a:cs typeface="Calibri" pitchFamily="34" charset="-120"/>
+              </a:rPr>
+              <a:t> · the PRG32 tools</a:t>
+            </a:r>
+            <a:endParaRPr lang="en-US" sz="1100" dirty="0"/>
+          </a:p>
+        </p:txBody>
+      </p:sp>
+      <p:sp>
+        <p:nvSpPr>
           <p:cNvPr id="25" name="Slide Number Placeholder 0"/>
           <p:cNvSpPr>
             <a:spLocks noGrp="1"/>
@@ -5715,6 +6446,158 @@
               <a:t>A black screen: check the wiring of the display against the firmware</a:t>
             </a:r>
             <a:endParaRPr lang="en-US" sz="1200" dirty="0"/>
+          </a:p>
+        </p:txBody>
+      </p:sp>
+      <p:sp>
+        <p:nvSpPr>
+          <p:cNvPr id="17" name="Shape 15"/>
+          <p:cNvSpPr/>
+          <p:nvPr/>
+        </p:nvSpPr>
+        <p:spPr>
+          <a:xfrm>
+            <a:off x="9287967" y="91440"/>
+            <a:ext cx="2355088" cy="274320"/>
+          </a:xfrm>
+          <a:prstGeom prst="rect">
+            <a:avLst/>
+          </a:prstGeom>
+          <a:solidFill>
+            <a:srgbClr val="FEF3C7"/>
+          </a:solidFill>
+          <a:ln w="12700">
+            <a:solidFill>
+              <a:srgbClr val="B45309"/>
+            </a:solidFill>
+            <a:prstDash val="solid"/>
+          </a:ln>
+        </p:spPr>
+      </p:sp>
+      <p:sp>
+        <p:nvSpPr>
+          <p:cNvPr id="18" name="Shape 16"/>
+          <p:cNvSpPr/>
+          <p:nvPr/>
+        </p:nvSpPr>
+        <p:spPr>
+          <a:xfrm>
+            <a:off x="9287967" y="91440"/>
+            <a:ext cx="27432" cy="274320"/>
+          </a:xfrm>
+          <a:prstGeom prst="rect">
+            <a:avLst/>
+          </a:prstGeom>
+          <a:solidFill>
+            <a:srgbClr val="B45309"/>
+          </a:solidFill>
+          <a:ln w="12700">
+            <a:solidFill>
+              <a:srgbClr val="B45309"/>
+            </a:solidFill>
+            <a:prstDash val="solid"/>
+          </a:ln>
+        </p:spPr>
+      </p:sp>
+      <p:sp>
+        <p:nvSpPr>
+          <p:cNvPr id="19" name="Shape 17"/>
+          <p:cNvSpPr/>
+          <p:nvPr/>
+        </p:nvSpPr>
+        <p:spPr>
+          <a:xfrm>
+            <a:off x="9342831" y="91440"/>
+            <a:ext cx="27432" cy="274320"/>
+          </a:xfrm>
+          <a:prstGeom prst="rect">
+            <a:avLst/>
+          </a:prstGeom>
+          <a:solidFill>
+            <a:srgbClr val="B45309"/>
+          </a:solidFill>
+          <a:ln w="12700">
+            <a:solidFill>
+              <a:srgbClr val="B45309"/>
+            </a:solidFill>
+            <a:prstDash val="solid"/>
+          </a:ln>
+        </p:spPr>
+      </p:sp>
+      <p:pic>
+        <p:nvPicPr>
+          <p:cNvPr id="20" name="Image 0" descr="preencoded.png">    </p:cNvPr>
+          <p:cNvPicPr>
+            <a:picLocks noChangeAspect="1"/>
+          </p:cNvPicPr>
+          <p:nvPr/>
+        </p:nvPicPr>
+        <p:blipFill>
+          <a:blip r:embed="rId1"/>
+          <a:stretch>
+            <a:fillRect/>
+          </a:stretch>
+        </p:blipFill>
+        <p:spPr>
+          <a:xfrm>
+            <a:off x="9415983" y="128016"/>
+            <a:ext cx="201168" cy="201168"/>
+          </a:xfrm>
+          <a:prstGeom prst="rect">
+            <a:avLst/>
+          </a:prstGeom>
+        </p:spPr>
+      </p:pic>
+      <p:sp>
+        <p:nvSpPr>
+          <p:cNvPr id="21" name="Text 18"/>
+          <p:cNvSpPr txBox="1"/>
+          <p:nvPr/>
+        </p:nvSpPr>
+        <p:spPr>
+          <a:xfrm>
+            <a:off x="9672015" y="91440"/>
+            <a:ext cx="1934464" cy="274320"/>
+          </a:xfrm>
+          <a:prstGeom prst="rect">
+            <a:avLst/>
+          </a:prstGeom>
+          <a:noFill/>
+          <a:ln/>
+        </p:spPr>
+        <p:txBody>
+          <a:bodyPr wrap="square" lIns="0" tIns="0" rIns="0" bIns="0" rtlCol="0" anchor="ctr"/>
+          <a:lstStyle/>
+          <a:p>
+            <a:pPr indent="0" marL="0">
+              <a:buNone/>
+            </a:pPr>
+            <a:r>
+              <a:rPr lang="en-US" sz="1100" b="1" dirty="0">
+                <a:solidFill>
+                  <a:srgbClr val="92400E"/>
+                </a:solidFill>
+                <a:latin typeface="Calibri" pitchFamily="34" charset="0"/>
+                <a:ea typeface="Calibri" pitchFamily="34" charset="-122"/>
+                <a:cs typeface="Calibri" pitchFamily="34" charset="-120"/>
+              </a:rPr>
+              <a:t>USE NOW</a:t>
+            </a:r>
+            <a:pPr indent="0" marL="0">
+              <a:buNone/>
+            </a:pPr>
+            <a:r>
+              <a:rPr lang="en-US" sz="1100" dirty="0">
+                <a:solidFill>
+                  <a:srgbClr val="92400E"/>
+                </a:solidFill>
+                <a:latin typeface="Calibri" pitchFamily="34" charset="0"/>
+                <a:ea typeface="Calibri" pitchFamily="34" charset="-122"/>
+                <a:cs typeface="Calibri" pitchFamily="34" charset="-120"/>
+              </a:rPr>
+              <a:t> · the PRG32 tools</a:t>
+            </a:r>
+            <a:endParaRPr lang="en-US" sz="1100" dirty="0"/>
           </a:p>
         </p:txBody>
       </p:sp>
@@ -7101,6 +7984,158 @@
       </p:graphicFrame>
       <p:sp>
         <p:nvSpPr>
+          <p:cNvPr id="4" name="Shape 1"/>
+          <p:cNvSpPr/>
+          <p:nvPr/>
+        </p:nvSpPr>
+        <p:spPr>
+          <a:xfrm>
+            <a:off x="9287967" y="91440"/>
+            <a:ext cx="2355088" cy="274320"/>
+          </a:xfrm>
+          <a:prstGeom prst="rect">
+            <a:avLst/>
+          </a:prstGeom>
+          <a:solidFill>
+            <a:srgbClr val="FEF3C7"/>
+          </a:solidFill>
+          <a:ln w="12700">
+            <a:solidFill>
+              <a:srgbClr val="B45309"/>
+            </a:solidFill>
+            <a:prstDash val="solid"/>
+          </a:ln>
+        </p:spPr>
+      </p:sp>
+      <p:sp>
+        <p:nvSpPr>
+          <p:cNvPr id="5" name="Shape 2"/>
+          <p:cNvSpPr/>
+          <p:nvPr/>
+        </p:nvSpPr>
+        <p:spPr>
+          <a:xfrm>
+            <a:off x="9287967" y="91440"/>
+            <a:ext cx="27432" cy="274320"/>
+          </a:xfrm>
+          <a:prstGeom prst="rect">
+            <a:avLst/>
+          </a:prstGeom>
+          <a:solidFill>
+            <a:srgbClr val="B45309"/>
+          </a:solidFill>
+          <a:ln w="12700">
+            <a:solidFill>
+              <a:srgbClr val="B45309"/>
+            </a:solidFill>
+            <a:prstDash val="solid"/>
+          </a:ln>
+        </p:spPr>
+      </p:sp>
+      <p:sp>
+        <p:nvSpPr>
+          <p:cNvPr id="6" name="Shape 3"/>
+          <p:cNvSpPr/>
+          <p:nvPr/>
+        </p:nvSpPr>
+        <p:spPr>
+          <a:xfrm>
+            <a:off x="9342831" y="91440"/>
+            <a:ext cx="27432" cy="274320"/>
+          </a:xfrm>
+          <a:prstGeom prst="rect">
+            <a:avLst/>
+          </a:prstGeom>
+          <a:solidFill>
+            <a:srgbClr val="B45309"/>
+          </a:solidFill>
+          <a:ln w="12700">
+            <a:solidFill>
+              <a:srgbClr val="B45309"/>
+            </a:solidFill>
+            <a:prstDash val="solid"/>
+          </a:ln>
+        </p:spPr>
+      </p:sp>
+      <p:pic>
+        <p:nvPicPr>
+          <p:cNvPr id="7" name="Image 0" descr="preencoded.png">    </p:cNvPr>
+          <p:cNvPicPr>
+            <a:picLocks noChangeAspect="1"/>
+          </p:cNvPicPr>
+          <p:nvPr/>
+        </p:nvPicPr>
+        <p:blipFill>
+          <a:blip r:embed="rId1"/>
+          <a:stretch>
+            <a:fillRect/>
+          </a:stretch>
+        </p:blipFill>
+        <p:spPr>
+          <a:xfrm>
+            <a:off x="9415983" y="128016"/>
+            <a:ext cx="201168" cy="201168"/>
+          </a:xfrm>
+          <a:prstGeom prst="rect">
+            <a:avLst/>
+          </a:prstGeom>
+        </p:spPr>
+      </p:pic>
+      <p:sp>
+        <p:nvSpPr>
+          <p:cNvPr id="8" name="Text 4"/>
+          <p:cNvSpPr txBox="1"/>
+          <p:nvPr/>
+        </p:nvSpPr>
+        <p:spPr>
+          <a:xfrm>
+            <a:off x="9672015" y="91440"/>
+            <a:ext cx="1934464" cy="274320"/>
+          </a:xfrm>
+          <a:prstGeom prst="rect">
+            <a:avLst/>
+          </a:prstGeom>
+          <a:noFill/>
+          <a:ln/>
+        </p:spPr>
+        <p:txBody>
+          <a:bodyPr wrap="square" lIns="0" tIns="0" rIns="0" bIns="0" rtlCol="0" anchor="ctr"/>
+          <a:lstStyle/>
+          <a:p>
+            <a:pPr indent="0" marL="0">
+              <a:buNone/>
+            </a:pPr>
+            <a:r>
+              <a:rPr lang="en-US" sz="1100" b="1" dirty="0">
+                <a:solidFill>
+                  <a:srgbClr val="92400E"/>
+                </a:solidFill>
+                <a:latin typeface="Calibri" pitchFamily="34" charset="0"/>
+                <a:ea typeface="Calibri" pitchFamily="34" charset="-122"/>
+                <a:cs typeface="Calibri" pitchFamily="34" charset="-120"/>
+              </a:rPr>
+              <a:t>USE NOW</a:t>
+            </a:r>
+            <a:pPr indent="0" marL="0">
+              <a:buNone/>
+            </a:pPr>
+            <a:r>
+              <a:rPr lang="en-US" sz="1100" dirty="0">
+                <a:solidFill>
+                  <a:srgbClr val="92400E"/>
+                </a:solidFill>
+                <a:latin typeface="Calibri" pitchFamily="34" charset="0"/>
+                <a:ea typeface="Calibri" pitchFamily="34" charset="-122"/>
+                <a:cs typeface="Calibri" pitchFamily="34" charset="-120"/>
+              </a:rPr>
+              <a:t> · the PRG32 tools</a:t>
+            </a:r>
+            <a:endParaRPr lang="en-US" sz="1100" dirty="0"/>
+          </a:p>
+        </p:txBody>
+      </p:sp>
+      <p:sp>
+        <p:nvSpPr>
           <p:cNvPr id="25" name="Slide Number Placeholder 0"/>
           <p:cNvSpPr>
             <a:spLocks noGrp="1"/>
@@ -9503,6 +10538,133 @@
       </p:sp>
       <p:sp>
         <p:nvSpPr>
+          <p:cNvPr id="17" name="Shape 15"/>
+          <p:cNvSpPr/>
+          <p:nvPr/>
+        </p:nvSpPr>
+        <p:spPr>
+          <a:xfrm>
+            <a:off x="8287715" y="91440"/>
+            <a:ext cx="3355340" cy="274320"/>
+          </a:xfrm>
+          <a:prstGeom prst="rect">
+            <a:avLst/>
+          </a:prstGeom>
+          <a:solidFill>
+            <a:srgbClr val="E0F2FE"/>
+          </a:solidFill>
+          <a:ln w="12700">
+            <a:solidFill>
+              <a:srgbClr val="0369A1"/>
+            </a:solidFill>
+            <a:prstDash val="solid"/>
+          </a:ln>
+        </p:spPr>
+      </p:sp>
+      <p:sp>
+        <p:nvSpPr>
+          <p:cNvPr id="18" name="Shape 16"/>
+          <p:cNvSpPr/>
+          <p:nvPr/>
+        </p:nvSpPr>
+        <p:spPr>
+          <a:xfrm>
+            <a:off x="8287715" y="91440"/>
+            <a:ext cx="73152" cy="274320"/>
+          </a:xfrm>
+          <a:prstGeom prst="rect">
+            <a:avLst/>
+          </a:prstGeom>
+          <a:solidFill>
+            <a:srgbClr val="0369A1"/>
+          </a:solidFill>
+          <a:ln w="12700">
+            <a:solidFill>
+              <a:srgbClr val="0369A1"/>
+            </a:solidFill>
+            <a:prstDash val="solid"/>
+          </a:ln>
+        </p:spPr>
+      </p:sp>
+      <p:pic>
+        <p:nvPicPr>
+          <p:cNvPr id="19" name="Image 0" descr="preencoded.png">    </p:cNvPr>
+          <p:cNvPicPr>
+            <a:picLocks noChangeAspect="1"/>
+          </p:cNvPicPr>
+          <p:nvPr/>
+        </p:nvPicPr>
+        <p:blipFill>
+          <a:blip r:embed="rId1"/>
+          <a:stretch>
+            <a:fillRect/>
+          </a:stretch>
+        </p:blipFill>
+        <p:spPr>
+          <a:xfrm>
+            <a:off x="8415731" y="128016"/>
+            <a:ext cx="201168" cy="201168"/>
+          </a:xfrm>
+          <a:prstGeom prst="rect">
+            <a:avLst/>
+          </a:prstGeom>
+        </p:spPr>
+      </p:pic>
+      <p:sp>
+        <p:nvSpPr>
+          <p:cNvPr id="20" name="Text 17"/>
+          <p:cNvSpPr txBox="1"/>
+          <p:nvPr/>
+        </p:nvSpPr>
+        <p:spPr>
+          <a:xfrm>
+            <a:off x="8671763" y="91440"/>
+            <a:ext cx="2934716" cy="274320"/>
+          </a:xfrm>
+          <a:prstGeom prst="rect">
+            <a:avLst/>
+          </a:prstGeom>
+          <a:noFill/>
+          <a:ln/>
+        </p:spPr>
+        <p:txBody>
+          <a:bodyPr wrap="square" lIns="0" tIns="0" rIns="0" bIns="0" rtlCol="0" anchor="ctr"/>
+          <a:lstStyle/>
+          <a:p>
+            <a:pPr indent="0" marL="0">
+              <a:buNone/>
+            </a:pPr>
+            <a:r>
+              <a:rPr lang="en-US" sz="1100" b="1" dirty="0">
+                <a:solidFill>
+                  <a:srgbClr val="075985"/>
+                </a:solidFill>
+                <a:latin typeface="Calibri" pitchFamily="34" charset="0"/>
+                <a:ea typeface="Calibri" pitchFamily="34" charset="-122"/>
+                <a:cs typeface="Calibri" pitchFamily="34" charset="-120"/>
+              </a:rPr>
+              <a:t>UNDERSTAND NOW</a:t>
+            </a:r>
+            <a:pPr indent="0" marL="0">
+              <a:buNone/>
+            </a:pPr>
+            <a:r>
+              <a:rPr lang="en-US" sz="1100" dirty="0">
+                <a:solidFill>
+                  <a:srgbClr val="075985"/>
+                </a:solidFill>
+                <a:latin typeface="Calibri" pitchFamily="34" charset="0"/>
+                <a:ea typeface="Calibri" pitchFamily="34" charset="-122"/>
+                <a:cs typeface="Calibri" pitchFamily="34" charset="-120"/>
+              </a:rPr>
+              <a:t> · finite-state machines</a:t>
+            </a:r>
+            <a:endParaRPr lang="en-US" sz="1100" dirty="0"/>
+          </a:p>
+        </p:txBody>
+      </p:sp>
+      <p:sp>
+        <p:nvSpPr>
           <p:cNvPr id="25" name="Slide Number Placeholder 0"/>
           <p:cNvSpPr>
             <a:spLocks noGrp="1"/>
@@ -9642,9 +10804,59 @@
           </a:ln>
         </p:spPr>
       </p:sp>
+      <p:sp>
+        <p:nvSpPr>
+          <p:cNvPr id="4" name="Shape 2"/>
+          <p:cNvSpPr/>
+          <p:nvPr/>
+        </p:nvSpPr>
+        <p:spPr>
+          <a:xfrm>
+            <a:off x="8287715" y="91440"/>
+            <a:ext cx="3355340" cy="274320"/>
+          </a:xfrm>
+          <a:prstGeom prst="rect">
+            <a:avLst/>
+          </a:prstGeom>
+          <a:solidFill>
+            <a:srgbClr val="E0F2FE"/>
+          </a:solidFill>
+          <a:ln w="12700">
+            <a:solidFill>
+              <a:srgbClr val="0369A1"/>
+            </a:solidFill>
+            <a:prstDash val="solid"/>
+          </a:ln>
+        </p:spPr>
+      </p:sp>
+      <p:sp>
+        <p:nvSpPr>
+          <p:cNvPr id="5" name="Shape 3"/>
+          <p:cNvSpPr/>
+          <p:nvPr/>
+        </p:nvSpPr>
+        <p:spPr>
+          <a:xfrm>
+            <a:off x="8287715" y="91440"/>
+            <a:ext cx="73152" cy="274320"/>
+          </a:xfrm>
+          <a:prstGeom prst="rect">
+            <a:avLst/>
+          </a:prstGeom>
+          <a:solidFill>
+            <a:srgbClr val="0369A1"/>
+          </a:solidFill>
+          <a:ln w="12700">
+            <a:solidFill>
+              <a:srgbClr val="0369A1"/>
+            </a:solidFill>
+            <a:prstDash val="solid"/>
+          </a:ln>
+        </p:spPr>
+      </p:sp>
       <p:pic>
         <p:nvPicPr>
-          <p:cNvPr id="5" name="Image 0" descr="preencoded.png">    </p:cNvPr>
+          <p:cNvPr id="6" name="Image 0" descr="preencoded.png">    </p:cNvPr>
           <p:cNvPicPr>
             <a:picLocks noChangeAspect="1"/>
           </p:cNvPicPr>
@@ -9652,6 +10864,83 @@
         </p:nvPicPr>
         <p:blipFill>
           <a:blip r:embed="rId1"/>
+          <a:stretch>
+            <a:fillRect/>
+          </a:stretch>
+        </p:blipFill>
+        <p:spPr>
+          <a:xfrm>
+            <a:off x="8415731" y="128016"/>
+            <a:ext cx="201168" cy="201168"/>
+          </a:xfrm>
+          <a:prstGeom prst="rect">
+            <a:avLst/>
+          </a:prstGeom>
+        </p:spPr>
+      </p:pic>
+      <p:sp>
+        <p:nvSpPr>
+          <p:cNvPr id="7" name="Text 4"/>
+          <p:cNvSpPr txBox="1"/>
+          <p:nvPr/>
+        </p:nvSpPr>
+        <p:spPr>
+          <a:xfrm>
+            <a:off x="8671763" y="91440"/>
+            <a:ext cx="2934716" cy="274320"/>
+          </a:xfrm>
+          <a:prstGeom prst="rect">
+            <a:avLst/>
+          </a:prstGeom>
+          <a:noFill/>
+          <a:ln/>
+        </p:spPr>
+        <p:txBody>
+          <a:bodyPr wrap="square" lIns="0" tIns="0" rIns="0" bIns="0" rtlCol="0" anchor="ctr"/>
+          <a:lstStyle/>
+          <a:p>
+            <a:pPr indent="0" marL="0">
+              <a:buNone/>
+            </a:pPr>
+            <a:r>
+              <a:rPr lang="en-US" sz="1100" b="1" dirty="0">
+                <a:solidFill>
+                  <a:srgbClr val="075985"/>
+                </a:solidFill>
+                <a:latin typeface="Calibri" pitchFamily="34" charset="0"/>
+                <a:ea typeface="Calibri" pitchFamily="34" charset="-122"/>
+                <a:cs typeface="Calibri" pitchFamily="34" charset="-120"/>
+              </a:rPr>
+              <a:t>UNDERSTAND NOW</a:t>
+            </a:r>
+            <a:pPr indent="0" marL="0">
+              <a:buNone/>
+            </a:pPr>
+            <a:r>
+              <a:rPr lang="en-US" sz="1100" dirty="0">
+                <a:solidFill>
+                  <a:srgbClr val="075985"/>
+                </a:solidFill>
+                <a:latin typeface="Calibri" pitchFamily="34" charset="0"/>
+                <a:ea typeface="Calibri" pitchFamily="34" charset="-122"/>
+                <a:cs typeface="Calibri" pitchFamily="34" charset="-120"/>
+              </a:rPr>
+              <a:t> · finite-state machines</a:t>
+            </a:r>
+            <a:endParaRPr lang="en-US" sz="1100" dirty="0"/>
+          </a:p>
+        </p:txBody>
+      </p:sp>
+      <p:pic>
+        <p:nvPicPr>
+          <p:cNvPr id="9" name="Image 1" descr="preencoded.png">    </p:cNvPr>
+          <p:cNvPicPr>
+            <a:picLocks noChangeAspect="1"/>
+          </p:cNvPicPr>
+          <p:nvPr/>
+        </p:nvPicPr>
+        <p:blipFill>
+          <a:blip r:embed="rId2"/>
           <a:stretch>
             <a:fillRect/>
           </a:stretch>
@@ -11814,6 +13103,133 @@
       </p:sp>
       <p:sp>
         <p:nvSpPr>
+          <p:cNvPr id="29" name="Shape 27"/>
+          <p:cNvSpPr/>
+          <p:nvPr/>
+        </p:nvSpPr>
+        <p:spPr>
+          <a:xfrm>
+            <a:off x="8156397" y="91440"/>
+            <a:ext cx="3486658" cy="274320"/>
+          </a:xfrm>
+          <a:prstGeom prst="rect">
+            <a:avLst/>
+          </a:prstGeom>
+          <a:solidFill>
+            <a:srgbClr val="E0F2FE"/>
+          </a:solidFill>
+          <a:ln w="12700">
+            <a:solidFill>
+              <a:srgbClr val="0369A1"/>
+            </a:solidFill>
+            <a:prstDash val="solid"/>
+          </a:ln>
+        </p:spPr>
+      </p:sp>
+      <p:sp>
+        <p:nvSpPr>
+          <p:cNvPr id="30" name="Shape 28"/>
+          <p:cNvSpPr/>
+          <p:nvPr/>
+        </p:nvSpPr>
+        <p:spPr>
+          <a:xfrm>
+            <a:off x="8156397" y="91440"/>
+            <a:ext cx="73152" cy="274320"/>
+          </a:xfrm>
+          <a:prstGeom prst="rect">
+            <a:avLst/>
+          </a:prstGeom>
+          <a:solidFill>
+            <a:srgbClr val="0369A1"/>
+          </a:solidFill>
+          <a:ln w="12700">
+            <a:solidFill>
+              <a:srgbClr val="0369A1"/>
+            </a:solidFill>
+            <a:prstDash val="solid"/>
+          </a:ln>
+        </p:spPr>
+      </p:sp>
+      <p:pic>
+        <p:nvPicPr>
+          <p:cNvPr id="31" name="Image 0" descr="preencoded.png">    </p:cNvPr>
+          <p:cNvPicPr>
+            <a:picLocks noChangeAspect="1"/>
+          </p:cNvPicPr>
+          <p:nvPr/>
+        </p:nvPicPr>
+        <p:blipFill>
+          <a:blip r:embed="rId1"/>
+          <a:stretch>
+            <a:fillRect/>
+          </a:stretch>
+        </p:blipFill>
+        <p:spPr>
+          <a:xfrm>
+            <a:off x="8284413" y="128016"/>
+            <a:ext cx="201168" cy="201168"/>
+          </a:xfrm>
+          <a:prstGeom prst="rect">
+            <a:avLst/>
+          </a:prstGeom>
+        </p:spPr>
+      </p:pic>
+      <p:sp>
+        <p:nvSpPr>
+          <p:cNvPr id="32" name="Text 29"/>
+          <p:cNvSpPr txBox="1"/>
+          <p:nvPr/>
+        </p:nvSpPr>
+        <p:spPr>
+          <a:xfrm>
+            <a:off x="8540445" y="91440"/>
+            <a:ext cx="3066034" cy="274320"/>
+          </a:xfrm>
+          <a:prstGeom prst="rect">
+            <a:avLst/>
+          </a:prstGeom>
+          <a:noFill/>
+          <a:ln/>
+        </p:spPr>
+        <p:txBody>
+          <a:bodyPr wrap="square" lIns="0" tIns="0" rIns="0" bIns="0" rtlCol="0" anchor="ctr"/>
+          <a:lstStyle/>
+          <a:p>
+            <a:pPr indent="0" marL="0">
+              <a:buNone/>
+            </a:pPr>
+            <a:r>
+              <a:rPr lang="en-US" sz="1100" b="1" dirty="0">
+                <a:solidFill>
+                  <a:srgbClr val="075985"/>
+                </a:solidFill>
+                <a:latin typeface="Calibri" pitchFamily="34" charset="0"/>
+                <a:ea typeface="Calibri" pitchFamily="34" charset="-122"/>
+                <a:cs typeface="Calibri" pitchFamily="34" charset="-120"/>
+              </a:rPr>
+              <a:t>UNDERSTAND NOW</a:t>
+            </a:r>
+            <a:pPr indent="0" marL="0">
+              <a:buNone/>
+            </a:pPr>
+            <a:r>
+              <a:rPr lang="en-US" sz="1100" dirty="0">
+                <a:solidFill>
+                  <a:srgbClr val="075985"/>
+                </a:solidFill>
+                <a:latin typeface="Calibri" pitchFamily="34" charset="0"/>
+                <a:ea typeface="Calibri" pitchFamily="34" charset="-122"/>
+                <a:cs typeface="Calibri" pitchFamily="34" charset="-120"/>
+              </a:rPr>
+              <a:t> · registers as flip-flops</a:t>
+            </a:r>
+            <a:endParaRPr lang="en-US" sz="1100" dirty="0"/>
+          </a:p>
+        </p:txBody>
+      </p:sp>
+      <p:sp>
+        <p:nvSpPr>
           <p:cNvPr id="25" name="Slide Number Placeholder 0"/>
           <p:cNvSpPr>
             <a:spLocks noGrp="1"/>
@@ -12521,6 +13937,133 @@
       </p:sp>
       <p:sp>
         <p:nvSpPr>
+          <p:cNvPr id="20" name="Shape 18"/>
+          <p:cNvSpPr/>
+          <p:nvPr/>
+        </p:nvSpPr>
+        <p:spPr>
+          <a:xfrm>
+            <a:off x="8287715" y="91440"/>
+            <a:ext cx="3355340" cy="274320"/>
+          </a:xfrm>
+          <a:prstGeom prst="rect">
+            <a:avLst/>
+          </a:prstGeom>
+          <a:solidFill>
+            <a:srgbClr val="E0F2FE"/>
+          </a:solidFill>
+          <a:ln w="12700">
+            <a:solidFill>
+              <a:srgbClr val="0369A1"/>
+            </a:solidFill>
+            <a:prstDash val="solid"/>
+          </a:ln>
+        </p:spPr>
+      </p:sp>
+      <p:sp>
+        <p:nvSpPr>
+          <p:cNvPr id="21" name="Shape 19"/>
+          <p:cNvSpPr/>
+          <p:nvPr/>
+        </p:nvSpPr>
+        <p:spPr>
+          <a:xfrm>
+            <a:off x="8287715" y="91440"/>
+            <a:ext cx="73152" cy="274320"/>
+          </a:xfrm>
+          <a:prstGeom prst="rect">
+            <a:avLst/>
+          </a:prstGeom>
+          <a:solidFill>
+            <a:srgbClr val="0369A1"/>
+          </a:solidFill>
+          <a:ln w="12700">
+            <a:solidFill>
+              <a:srgbClr val="0369A1"/>
+            </a:solidFill>
+            <a:prstDash val="solid"/>
+          </a:ln>
+        </p:spPr>
+      </p:sp>
+      <p:pic>
+        <p:nvPicPr>
+          <p:cNvPr id="22" name="Image 0" descr="preencoded.png">    </p:cNvPr>
+          <p:cNvPicPr>
+            <a:picLocks noChangeAspect="1"/>
+          </p:cNvPicPr>
+          <p:nvPr/>
+        </p:nvPicPr>
+        <p:blipFill>
+          <a:blip r:embed="rId1"/>
+          <a:stretch>
+            <a:fillRect/>
+          </a:stretch>
+        </p:blipFill>
+        <p:spPr>
+          <a:xfrm>
+            <a:off x="8415731" y="128016"/>
+            <a:ext cx="201168" cy="201168"/>
+          </a:xfrm>
+          <a:prstGeom prst="rect">
+            <a:avLst/>
+          </a:prstGeom>
+        </p:spPr>
+      </p:pic>
+      <p:sp>
+        <p:nvSpPr>
+          <p:cNvPr id="23" name="Text 20"/>
+          <p:cNvSpPr txBox="1"/>
+          <p:nvPr/>
+        </p:nvSpPr>
+        <p:spPr>
+          <a:xfrm>
+            <a:off x="8671763" y="91440"/>
+            <a:ext cx="2934716" cy="274320"/>
+          </a:xfrm>
+          <a:prstGeom prst="rect">
+            <a:avLst/>
+          </a:prstGeom>
+          <a:noFill/>
+          <a:ln/>
+        </p:spPr>
+        <p:txBody>
+          <a:bodyPr wrap="square" lIns="0" tIns="0" rIns="0" bIns="0" rtlCol="0" anchor="ctr"/>
+          <a:lstStyle/>
+          <a:p>
+            <a:pPr indent="0" marL="0">
+              <a:buNone/>
+            </a:pPr>
+            <a:r>
+              <a:rPr lang="en-US" sz="1100" b="1" dirty="0">
+                <a:solidFill>
+                  <a:srgbClr val="075985"/>
+                </a:solidFill>
+                <a:latin typeface="Calibri" pitchFamily="34" charset="0"/>
+                <a:ea typeface="Calibri" pitchFamily="34" charset="-122"/>
+                <a:cs typeface="Calibri" pitchFamily="34" charset="-120"/>
+              </a:rPr>
+              <a:t>UNDERSTAND NOW</a:t>
+            </a:r>
+            <a:pPr indent="0" marL="0">
+              <a:buNone/>
+            </a:pPr>
+            <a:r>
+              <a:rPr lang="en-US" sz="1100" dirty="0">
+                <a:solidFill>
+                  <a:srgbClr val="075985"/>
+                </a:solidFill>
+                <a:latin typeface="Calibri" pitchFamily="34" charset="0"/>
+                <a:ea typeface="Calibri" pitchFamily="34" charset="-122"/>
+                <a:cs typeface="Calibri" pitchFamily="34" charset="-120"/>
+              </a:rPr>
+              <a:t> · finite-state machines</a:t>
+            </a:r>
+            <a:endParaRPr lang="en-US" sz="1100" dirty="0"/>
+          </a:p>
+        </p:txBody>
+      </p:sp>
+      <p:sp>
+        <p:nvSpPr>
           <p:cNvPr id="25" name="Slide Number Placeholder 0"/>
           <p:cNvSpPr>
             <a:spLocks noGrp="1"/>
@@ -13041,6 +14584,158 @@
       </p:sp>
       <p:sp>
         <p:nvSpPr>
+          <p:cNvPr id="5" name="Shape 3"/>
+          <p:cNvSpPr/>
+          <p:nvPr/>
+        </p:nvSpPr>
+        <p:spPr>
+          <a:xfrm>
+            <a:off x="8959672" y="91440"/>
+            <a:ext cx="2683383" cy="274320"/>
+          </a:xfrm>
+          <a:prstGeom prst="rect">
+            <a:avLst/>
+          </a:prstGeom>
+          <a:solidFill>
+            <a:srgbClr val="FEF3C7"/>
+          </a:solidFill>
+          <a:ln w="12700">
+            <a:solidFill>
+              <a:srgbClr val="B45309"/>
+            </a:solidFill>
+            <a:prstDash val="solid"/>
+          </a:ln>
+        </p:spPr>
+      </p:sp>
+      <p:sp>
+        <p:nvSpPr>
+          <p:cNvPr id="6" name="Shape 4"/>
+          <p:cNvSpPr/>
+          <p:nvPr/>
+        </p:nvSpPr>
+        <p:spPr>
+          <a:xfrm>
+            <a:off x="8959672" y="91440"/>
+            <a:ext cx="27432" cy="274320"/>
+          </a:xfrm>
+          <a:prstGeom prst="rect">
+            <a:avLst/>
+          </a:prstGeom>
+          <a:solidFill>
+            <a:srgbClr val="B45309"/>
+          </a:solidFill>
+          <a:ln w="12700">
+            <a:solidFill>
+              <a:srgbClr val="B45309"/>
+            </a:solidFill>
+            <a:prstDash val="solid"/>
+          </a:ln>
+        </p:spPr>
+      </p:sp>
+      <p:sp>
+        <p:nvSpPr>
+          <p:cNvPr id="7" name="Shape 5"/>
+          <p:cNvSpPr/>
+          <p:nvPr/>
+        </p:nvSpPr>
+        <p:spPr>
+          <a:xfrm>
+            <a:off x="9014536" y="91440"/>
+            <a:ext cx="27432" cy="274320"/>
+          </a:xfrm>
+          <a:prstGeom prst="rect">
+            <a:avLst/>
+          </a:prstGeom>
+          <a:solidFill>
+            <a:srgbClr val="B45309"/>
+          </a:solidFill>
+          <a:ln w="12700">
+            <a:solidFill>
+              <a:srgbClr val="B45309"/>
+            </a:solidFill>
+            <a:prstDash val="solid"/>
+          </a:ln>
+        </p:spPr>
+      </p:sp>
+      <p:pic>
+        <p:nvPicPr>
+          <p:cNvPr id="8" name="Image 0" descr="preencoded.png">    </p:cNvPr>
+          <p:cNvPicPr>
+            <a:picLocks noChangeAspect="1"/>
+          </p:cNvPicPr>
+          <p:nvPr/>
+        </p:nvPicPr>
+        <p:blipFill>
+          <a:blip r:embed="rId1"/>
+          <a:stretch>
+            <a:fillRect/>
+          </a:stretch>
+        </p:blipFill>
+        <p:spPr>
+          <a:xfrm>
+            <a:off x="9087688" y="128016"/>
+            <a:ext cx="201168" cy="201168"/>
+          </a:xfrm>
+          <a:prstGeom prst="rect">
+            <a:avLst/>
+          </a:prstGeom>
+        </p:spPr>
+      </p:pic>
+      <p:sp>
+        <p:nvSpPr>
+          <p:cNvPr id="9" name="Text 6"/>
+          <p:cNvSpPr txBox="1"/>
+          <p:nvPr/>
+        </p:nvSpPr>
+        <p:spPr>
+          <a:xfrm>
+            <a:off x="9343720" y="91440"/>
+            <a:ext cx="2262759" cy="274320"/>
+          </a:xfrm>
+          <a:prstGeom prst="rect">
+            <a:avLst/>
+          </a:prstGeom>
+          <a:noFill/>
+          <a:ln/>
+        </p:spPr>
+        <p:txBody>
+          <a:bodyPr wrap="square" lIns="0" tIns="0" rIns="0" bIns="0" rtlCol="0" anchor="ctr"/>
+          <a:lstStyle/>
+          <a:p>
+            <a:pPr indent="0" marL="0">
+              <a:buNone/>
+            </a:pPr>
+            <a:r>
+              <a:rPr lang="en-US" sz="1100" b="1" dirty="0">
+                <a:solidFill>
+                  <a:srgbClr val="92400E"/>
+                </a:solidFill>
+                <a:latin typeface="Calibri" pitchFamily="34" charset="0"/>
+                <a:ea typeface="Calibri" pitchFamily="34" charset="-122"/>
+                <a:cs typeface="Calibri" pitchFamily="34" charset="-120"/>
+              </a:rPr>
+              <a:t>USE NOW</a:t>
+            </a:r>
+            <a:pPr indent="0" marL="0">
+              <a:buNone/>
+            </a:pPr>
+            <a:r>
+              <a:rPr lang="en-US" sz="1100" dirty="0">
+                <a:solidFill>
+                  <a:srgbClr val="92400E"/>
+                </a:solidFill>
+                <a:latin typeface="Calibri" pitchFamily="34" charset="0"/>
+                <a:ea typeface="Calibri" pitchFamily="34" charset="-122"/>
+                <a:cs typeface="Calibri" pitchFamily="34" charset="-120"/>
+              </a:rPr>
+              <a:t> · the complete program</a:t>
+            </a:r>
+            <a:endParaRPr lang="en-US" sz="1100" dirty="0"/>
+          </a:p>
+        </p:txBody>
+      </p:sp>
+      <p:sp>
+        <p:nvSpPr>
           <p:cNvPr id="25" name="Slide Number Placeholder 0"/>
           <p:cNvSpPr>
             <a:spLocks noGrp="1"/>
@@ -13721,6 +15416,158 @@
       </p:sp>
       <p:sp>
         <p:nvSpPr>
+          <p:cNvPr id="5" name="Shape 3"/>
+          <p:cNvSpPr/>
+          <p:nvPr/>
+        </p:nvSpPr>
+        <p:spPr>
+          <a:xfrm>
+            <a:off x="8959672" y="91440"/>
+            <a:ext cx="2683383" cy="274320"/>
+          </a:xfrm>
+          <a:prstGeom prst="rect">
+            <a:avLst/>
+          </a:prstGeom>
+          <a:solidFill>
+            <a:srgbClr val="FEF3C7"/>
+          </a:solidFill>
+          <a:ln w="12700">
+            <a:solidFill>
+              <a:srgbClr val="B45309"/>
+            </a:solidFill>
+            <a:prstDash val="solid"/>
+          </a:ln>
+        </p:spPr>
+      </p:sp>
+      <p:sp>
+        <p:nvSpPr>
+          <p:cNvPr id="6" name="Shape 4"/>
+          <p:cNvSpPr/>
+          <p:nvPr/>
+        </p:nvSpPr>
+        <p:spPr>
+          <a:xfrm>
+            <a:off x="8959672" y="91440"/>
+            <a:ext cx="27432" cy="274320"/>
+          </a:xfrm>
+          <a:prstGeom prst="rect">
+            <a:avLst/>
+          </a:prstGeom>
+          <a:solidFill>
+            <a:srgbClr val="B45309"/>
+          </a:solidFill>
+          <a:ln w="12700">
+            <a:solidFill>
+              <a:srgbClr val="B45309"/>
+            </a:solidFill>
+            <a:prstDash val="solid"/>
+          </a:ln>
+        </p:spPr>
+      </p:sp>
+      <p:sp>
+        <p:nvSpPr>
+          <p:cNvPr id="7" name="Shape 5"/>
+          <p:cNvSpPr/>
+          <p:nvPr/>
+        </p:nvSpPr>
+        <p:spPr>
+          <a:xfrm>
+            <a:off x="9014536" y="91440"/>
+            <a:ext cx="27432" cy="274320"/>
+          </a:xfrm>
+          <a:prstGeom prst="rect">
+            <a:avLst/>
+          </a:prstGeom>
+          <a:solidFill>
+            <a:srgbClr val="B45309"/>
+          </a:solidFill>
+          <a:ln w="12700">
+            <a:solidFill>
+              <a:srgbClr val="B45309"/>
+            </a:solidFill>
+            <a:prstDash val="solid"/>
+          </a:ln>
+        </p:spPr>
+      </p:sp>
+      <p:pic>
+        <p:nvPicPr>
+          <p:cNvPr id="8" name="Image 0" descr="preencoded.png">    </p:cNvPr>
+          <p:cNvPicPr>
+            <a:picLocks noChangeAspect="1"/>
+          </p:cNvPicPr>
+          <p:nvPr/>
+        </p:nvPicPr>
+        <p:blipFill>
+          <a:blip r:embed="rId1"/>
+          <a:stretch>
+            <a:fillRect/>
+          </a:stretch>
+        </p:blipFill>
+        <p:spPr>
+          <a:xfrm>
+            <a:off x="9087688" y="128016"/>
+            <a:ext cx="201168" cy="201168"/>
+          </a:xfrm>
+          <a:prstGeom prst="rect">
+            <a:avLst/>
+          </a:prstGeom>
+        </p:spPr>
+      </p:pic>
+      <p:sp>
+        <p:nvSpPr>
+          <p:cNvPr id="9" name="Text 6"/>
+          <p:cNvSpPr txBox="1"/>
+          <p:nvPr/>
+        </p:nvSpPr>
+        <p:spPr>
+          <a:xfrm>
+            <a:off x="9343720" y="91440"/>
+            <a:ext cx="2262759" cy="274320"/>
+          </a:xfrm>
+          <a:prstGeom prst="rect">
+            <a:avLst/>
+          </a:prstGeom>
+          <a:noFill/>
+          <a:ln/>
+        </p:spPr>
+        <p:txBody>
+          <a:bodyPr wrap="square" lIns="0" tIns="0" rIns="0" bIns="0" rtlCol="0" anchor="ctr"/>
+          <a:lstStyle/>
+          <a:p>
+            <a:pPr indent="0" marL="0">
+              <a:buNone/>
+            </a:pPr>
+            <a:r>
+              <a:rPr lang="en-US" sz="1100" b="1" dirty="0">
+                <a:solidFill>
+                  <a:srgbClr val="92400E"/>
+                </a:solidFill>
+                <a:latin typeface="Calibri" pitchFamily="34" charset="0"/>
+                <a:ea typeface="Calibri" pitchFamily="34" charset="-122"/>
+                <a:cs typeface="Calibri" pitchFamily="34" charset="-120"/>
+              </a:rPr>
+              <a:t>USE NOW</a:t>
+            </a:r>
+            <a:pPr indent="0" marL="0">
+              <a:buNone/>
+            </a:pPr>
+            <a:r>
+              <a:rPr lang="en-US" sz="1100" dirty="0">
+                <a:solidFill>
+                  <a:srgbClr val="92400E"/>
+                </a:solidFill>
+                <a:latin typeface="Calibri" pitchFamily="34" charset="0"/>
+                <a:ea typeface="Calibri" pitchFamily="34" charset="-122"/>
+                <a:cs typeface="Calibri" pitchFamily="34" charset="-120"/>
+              </a:rPr>
+              <a:t> · the complete program</a:t>
+            </a:r>
+            <a:endParaRPr lang="en-US" sz="1100" dirty="0"/>
+          </a:p>
+        </p:txBody>
+      </p:sp>
+      <p:sp>
+        <p:nvSpPr>
           <p:cNvPr id="25" name="Slide Number Placeholder 0"/>
           <p:cNvSpPr>
             <a:spLocks noGrp="1"/>
@@ -14244,6 +16091,158 @@
               <a:t>state: .word TITLE</a:t>
             </a:r>
             <a:endParaRPr lang="en-US" sz="1500" dirty="0"/>
+          </a:p>
+        </p:txBody>
+      </p:sp>
+      <p:sp>
+        <p:nvSpPr>
+          <p:cNvPr id="5" name="Shape 3"/>
+          <p:cNvSpPr/>
+          <p:nvPr/>
+        </p:nvSpPr>
+        <p:spPr>
+          <a:xfrm>
+            <a:off x="8959672" y="91440"/>
+            <a:ext cx="2683383" cy="274320"/>
+          </a:xfrm>
+          <a:prstGeom prst="rect">
+            <a:avLst/>
+          </a:prstGeom>
+          <a:solidFill>
+            <a:srgbClr val="FEF3C7"/>
+          </a:solidFill>
+          <a:ln w="12700">
+            <a:solidFill>
+              <a:srgbClr val="B45309"/>
+            </a:solidFill>
+            <a:prstDash val="solid"/>
+          </a:ln>
+        </p:spPr>
+      </p:sp>
+      <p:sp>
+        <p:nvSpPr>
+          <p:cNvPr id="6" name="Shape 4"/>
+          <p:cNvSpPr/>
+          <p:nvPr/>
+        </p:nvSpPr>
+        <p:spPr>
+          <a:xfrm>
+            <a:off x="8959672" y="91440"/>
+            <a:ext cx="27432" cy="274320"/>
+          </a:xfrm>
+          <a:prstGeom prst="rect">
+            <a:avLst/>
+          </a:prstGeom>
+          <a:solidFill>
+            <a:srgbClr val="B45309"/>
+          </a:solidFill>
+          <a:ln w="12700">
+            <a:solidFill>
+              <a:srgbClr val="B45309"/>
+            </a:solidFill>
+            <a:prstDash val="solid"/>
+          </a:ln>
+        </p:spPr>
+      </p:sp>
+      <p:sp>
+        <p:nvSpPr>
+          <p:cNvPr id="7" name="Shape 5"/>
+          <p:cNvSpPr/>
+          <p:nvPr/>
+        </p:nvSpPr>
+        <p:spPr>
+          <a:xfrm>
+            <a:off x="9014536" y="91440"/>
+            <a:ext cx="27432" cy="274320"/>
+          </a:xfrm>
+          <a:prstGeom prst="rect">
+            <a:avLst/>
+          </a:prstGeom>
+          <a:solidFill>
+            <a:srgbClr val="B45309"/>
+          </a:solidFill>
+          <a:ln w="12700">
+            <a:solidFill>
+              <a:srgbClr val="B45309"/>
+            </a:solidFill>
+            <a:prstDash val="solid"/>
+          </a:ln>
+        </p:spPr>
+      </p:sp>
+      <p:pic>
+        <p:nvPicPr>
+          <p:cNvPr id="8" name="Image 0" descr="preencoded.png">    </p:cNvPr>
+          <p:cNvPicPr>
+            <a:picLocks noChangeAspect="1"/>
+          </p:cNvPicPr>
+          <p:nvPr/>
+        </p:nvPicPr>
+        <p:blipFill>
+          <a:blip r:embed="rId1"/>
+          <a:stretch>
+            <a:fillRect/>
+          </a:stretch>
+        </p:blipFill>
+        <p:spPr>
+          <a:xfrm>
+            <a:off x="9087688" y="128016"/>
+            <a:ext cx="201168" cy="201168"/>
+          </a:xfrm>
+          <a:prstGeom prst="rect">
+            <a:avLst/>
+          </a:prstGeom>
+        </p:spPr>
+      </p:pic>
+      <p:sp>
+        <p:nvSpPr>
+          <p:cNvPr id="9" name="Text 6"/>
+          <p:cNvSpPr txBox="1"/>
+          <p:nvPr/>
+        </p:nvSpPr>
+        <p:spPr>
+          <a:xfrm>
+            <a:off x="9343720" y="91440"/>
+            <a:ext cx="2262759" cy="274320"/>
+          </a:xfrm>
+          <a:prstGeom prst="rect">
+            <a:avLst/>
+          </a:prstGeom>
+          <a:noFill/>
+          <a:ln/>
+        </p:spPr>
+        <p:txBody>
+          <a:bodyPr wrap="square" lIns="0" tIns="0" rIns="0" bIns="0" rtlCol="0" anchor="ctr"/>
+          <a:lstStyle/>
+          <a:p>
+            <a:pPr indent="0" marL="0">
+              <a:buNone/>
+            </a:pPr>
+            <a:r>
+              <a:rPr lang="en-US" sz="1100" b="1" dirty="0">
+                <a:solidFill>
+                  <a:srgbClr val="92400E"/>
+                </a:solidFill>
+                <a:latin typeface="Calibri" pitchFamily="34" charset="0"/>
+                <a:ea typeface="Calibri" pitchFamily="34" charset="-122"/>
+                <a:cs typeface="Calibri" pitchFamily="34" charset="-120"/>
+              </a:rPr>
+              <a:t>USE NOW</a:t>
+            </a:r>
+            <a:pPr indent="0" marL="0">
+              <a:buNone/>
+            </a:pPr>
+            <a:r>
+              <a:rPr lang="en-US" sz="1100" dirty="0">
+                <a:solidFill>
+                  <a:srgbClr val="92400E"/>
+                </a:solidFill>
+                <a:latin typeface="Calibri" pitchFamily="34" charset="0"/>
+                <a:ea typeface="Calibri" pitchFamily="34" charset="-122"/>
+                <a:cs typeface="Calibri" pitchFamily="34" charset="-120"/>
+              </a:rPr>
+              <a:t> · the complete program</a:t>
+            </a:r>
+            <a:endParaRPr lang="en-US" sz="1100" dirty="0"/>
           </a:p>
         </p:txBody>
       </p:sp>

--- a/en/slides/13-Computer_Architecture-Sequential_Machines-Code.pptx
+++ b/en/slides/13-Computer_Architecture-Sequential_Machines-Code.pptx
@@ -121,36 +121,36 @@
   <p:extLst>
     <p:ext uri="{521415D9-36F7-43E2-AB2F-B90AF26B5E84}">
       <p14:sectionLst xmlns:p14="http://schemas.microsoft.com/office/powerpoint/2010/main">
-        <p14:section name="Opening" id="{44302ae7-c897-67d2-5fd1-50ae41ffb166}">
+        <p14:section name="Opening" id="{94d5d965-1df6-7bc2-f34b-0715aaadda95}">
           <p14:sldIdLst>
             <p14:sldId id="256"/>
             <p14:sldId id="257"/>
           </p14:sldIdLst>
         </p14:section>
-        <p14:section name="Warm-up on the machine" id="{364c0d2b-c942-8ba0-1146-aba2098c8b5f}">
+        <p14:section name="Warm-up on the machine" id="{601ed1a7-3686-e153-bea2-26034e38938f}">
           <p14:sldIdLst>
             <p14:sldId id="258"/>
           </p14:sldIdLst>
         </p14:section>
-        <p14:section name="Finite-state machines" id="{1874e0ce-d30d-3349-2ffb-212219f4cc69}">
+        <p14:section name="Finite-state machines" id="{388f8b70-27e7-a069-5867-ce8e5fe7da57}">
           <p14:sldIdLst>
             <p14:sldId id="259"/>
           </p14:sldIdLst>
         </p14:section>
-        <p14:section name="Back to the machine" id="{f40234ff-18e1-591f-0e35-f5eb07b9280b}">
+        <p14:section name="Back to the machine" id="{8a69d8fc-a30a-142d-31d1-c399de9b3879}">
           <p14:sldIdLst>
             <p14:sldId id="260"/>
             <p14:sldId id="261"/>
           </p14:sldIdLst>
         </p14:section>
-        <p14:section name="The complete program" id="{2e0a4165-3fb4-ae7f-cc0c-185e1891ba1b}">
+        <p14:section name="The complete program" id="{963f6302-7a74-00d1-3f0c-c26a292de256}">
           <p14:sldIdLst>
             <p14:sldId id="262"/>
             <p14:sldId id="263"/>
             <p14:sldId id="264"/>
           </p14:sldIdLst>
         </p14:section>
-        <p14:section name="Run it and test it" id="{baad449c-ccbc-0dbe-ca66-0d158b2d6961}">
+        <p14:section name="Run it and test it" id="{6e2becf3-e253-dba9-7b65-9d717da0b145}">
           <p14:sldIdLst>
             <p14:sldId id="265"/>
             <p14:sldId id="266"/>
@@ -159,7 +159,7 @@
             <p14:sldId id="269"/>
           </p14:sldIdLst>
         </p14:section>
-        <p14:section name="Exercises" id="{821b6385-25ea-4ab7-d6e6-c88df2736193}">
+        <p14:section name="Exercises" id="{4f01fa90-d74a-f0d5-df98-bf9356ef2c09}">
           <p14:sldIdLst>
             <p14:sldId id="270"/>
           </p14:sldIdLst>
